--- a/examples/example-deck.pptx
+++ b/examples/example-deck.pptx
@@ -2260,7 +2260,7 @@
         </p:spPr>
         <p:txBody>
           <a:bodyPr wrap="square" lIns="0" tIns="0" rIns="0" bIns="0" rtlCol="0" anchor="t">
-            <a:spAutoFit/>
+            <a:noAutofit/>
           </a:bodyPr>
           <a:lstStyle/>
           <a:p>
@@ -2301,7 +2301,7 @@
         </p:spPr>
         <p:txBody>
           <a:bodyPr wrap="square" lIns="0" tIns="0" rIns="0" bIns="0" rtlCol="0" anchor="t">
-            <a:spAutoFit/>
+            <a:noAutofit/>
           </a:bodyPr>
           <a:lstStyle/>
           <a:p>
@@ -2342,7 +2342,7 @@
         </p:spPr>
         <p:txBody>
           <a:bodyPr wrap="square" lIns="0" tIns="0" rIns="0" bIns="0" rtlCol="0" anchor="t">
-            <a:spAutoFit/>
+            <a:noAutofit/>
           </a:bodyPr>
           <a:lstStyle/>
           <a:p>
@@ -2406,7 +2406,7 @@
         </p:spPr>
         <p:txBody>
           <a:bodyPr wrap="square" lIns="0" tIns="0" rIns="0" bIns="0" rtlCol="0" anchor="t">
-            <a:spAutoFit/>
+            <a:noAutofit/>
           </a:bodyPr>
           <a:lstStyle/>
           <a:p>
@@ -2678,7 +2678,7 @@
         </p:spPr>
         <p:txBody>
           <a:bodyPr wrap="square" lIns="0" tIns="0" rIns="0" bIns="0" rtlCol="0" anchor="t">
-            <a:spAutoFit/>
+            <a:noAutofit/>
           </a:bodyPr>
           <a:lstStyle/>
           <a:p>
@@ -2719,7 +2719,7 @@
         </p:spPr>
         <p:txBody>
           <a:bodyPr wrap="square" lIns="0" tIns="0" rIns="0" bIns="0" rtlCol="0" anchor="t">
-            <a:spAutoFit/>
+            <a:noAutofit/>
           </a:bodyPr>
           <a:lstStyle/>
           <a:p>
@@ -2760,7 +2760,7 @@
         </p:spPr>
         <p:txBody>
           <a:bodyPr wrap="square" lIns="0" tIns="0" rIns="0" bIns="0" rtlCol="0" anchor="t">
-            <a:spAutoFit/>
+            <a:noAutofit/>
           </a:bodyPr>
           <a:lstStyle/>
           <a:p>
@@ -2804,7 +2804,7 @@
         </p:spPr>
         <p:txBody>
           <a:bodyPr wrap="square" lIns="0" tIns="0" rIns="0" bIns="0" rtlCol="0" anchor="t">
-            <a:spAutoFit/>
+            <a:noAutofit/>
           </a:bodyPr>
           <a:lstStyle/>
           <a:p>
@@ -2845,7 +2845,7 @@
         </p:spPr>
         <p:txBody>
           <a:bodyPr wrap="square" lIns="0" tIns="0" rIns="0" bIns="0" rtlCol="0" anchor="t">
-            <a:spAutoFit/>
+            <a:noAutofit/>
           </a:bodyPr>
           <a:lstStyle/>
           <a:p>
@@ -2889,7 +2889,7 @@
         </p:spPr>
         <p:txBody>
           <a:bodyPr wrap="square" lIns="0" tIns="0" rIns="0" bIns="0" rtlCol="0" anchor="t">
-            <a:spAutoFit/>
+            <a:noAutofit/>
           </a:bodyPr>
           <a:lstStyle/>
           <a:p>
@@ -2930,7 +2930,7 @@
         </p:spPr>
         <p:txBody>
           <a:bodyPr wrap="square" lIns="0" tIns="0" rIns="0" bIns="0" rtlCol="0" anchor="t">
-            <a:spAutoFit/>
+            <a:noAutofit/>
           </a:bodyPr>
           <a:lstStyle/>
           <a:p>
@@ -2974,7 +2974,7 @@
         </p:spPr>
         <p:txBody>
           <a:bodyPr wrap="square" lIns="0" tIns="0" rIns="0" bIns="0" rtlCol="0" anchor="t">
-            <a:spAutoFit/>
+            <a:noAutofit/>
           </a:bodyPr>
           <a:lstStyle/>
           <a:p>
@@ -3015,7 +3015,7 @@
         </p:spPr>
         <p:txBody>
           <a:bodyPr wrap="square" lIns="0" tIns="0" rIns="0" bIns="0" rtlCol="0" anchor="t">
-            <a:spAutoFit/>
+            <a:noAutofit/>
           </a:bodyPr>
           <a:lstStyle/>
           <a:p>
@@ -3059,7 +3059,7 @@
         </p:spPr>
         <p:txBody>
           <a:bodyPr wrap="square" lIns="0" tIns="0" rIns="0" bIns="0" rtlCol="0" anchor="t">
-            <a:spAutoFit/>
+            <a:noAutofit/>
           </a:bodyPr>
           <a:lstStyle/>
           <a:p>
@@ -3103,7 +3103,7 @@
         </p:spPr>
         <p:txBody>
           <a:bodyPr wrap="square" lIns="0" tIns="0" rIns="0" bIns="0" rtlCol="0" anchor="t">
-            <a:spAutoFit/>
+            <a:noAutofit/>
           </a:bodyPr>
           <a:lstStyle/>
           <a:p>
@@ -3375,7 +3375,7 @@
         </p:spPr>
         <p:txBody>
           <a:bodyPr wrap="square" lIns="0" tIns="0" rIns="0" bIns="0" rtlCol="0" anchor="t">
-            <a:spAutoFit/>
+            <a:noAutofit/>
           </a:bodyPr>
           <a:lstStyle/>
           <a:p>
@@ -3416,7 +3416,7 @@
         </p:spPr>
         <p:txBody>
           <a:bodyPr wrap="square" lIns="0" tIns="0" rIns="0" bIns="0" rtlCol="0" anchor="t">
-            <a:spAutoFit/>
+            <a:noAutofit/>
           </a:bodyPr>
           <a:lstStyle/>
           <a:p>
@@ -3487,7 +3487,7 @@
         </p:spPr>
         <p:txBody>
           <a:bodyPr wrap="square" lIns="190500" tIns="0" rIns="0" bIns="0" rtlCol="0" anchor="t">
-            <a:spAutoFit/>
+            <a:noAutofit/>
           </a:bodyPr>
           <a:lstStyle/>
           <a:p>
@@ -3531,7 +3531,7 @@
         </p:spPr>
         <p:txBody>
           <a:bodyPr wrap="square" lIns="0" tIns="0" rIns="0" bIns="0" rtlCol="0" anchor="t">
-            <a:spAutoFit/>
+            <a:noAutofit/>
           </a:bodyPr>
           <a:lstStyle/>
           <a:p>
@@ -3575,7 +3575,7 @@
         </p:spPr>
         <p:txBody>
           <a:bodyPr wrap="square" lIns="0" tIns="0" rIns="0" bIns="0" rtlCol="0" anchor="t">
-            <a:spAutoFit/>
+            <a:noAutofit/>
           </a:bodyPr>
           <a:lstStyle/>
           <a:p>
@@ -3847,7 +3847,7 @@
         </p:spPr>
         <p:txBody>
           <a:bodyPr wrap="square" lIns="0" tIns="0" rIns="0" bIns="0" rtlCol="0" anchor="t">
-            <a:spAutoFit/>
+            <a:noAutofit/>
           </a:bodyPr>
           <a:lstStyle/>
           <a:p>
@@ -3888,7 +3888,7 @@
         </p:spPr>
         <p:txBody>
           <a:bodyPr wrap="square" lIns="0" tIns="0" rIns="0" bIns="0" rtlCol="0" anchor="t">
-            <a:spAutoFit/>
+            <a:noAutofit/>
           </a:bodyPr>
           <a:lstStyle/>
           <a:p>
@@ -3929,7 +3929,7 @@
         </p:spPr>
         <p:txBody>
           <a:bodyPr wrap="square" lIns="0" tIns="0" rIns="0" bIns="0" rtlCol="0" anchor="t">
-            <a:spAutoFit/>
+            <a:noAutofit/>
           </a:bodyPr>
           <a:lstStyle/>
           <a:p>
@@ -4952,7 +4952,7 @@
         </p:spPr>
         <p:txBody>
           <a:bodyPr wrap="square" lIns="0" tIns="0" rIns="0" bIns="0" rtlCol="0" anchor="t">
-            <a:spAutoFit/>
+            <a:noAutofit/>
           </a:bodyPr>
           <a:lstStyle/>
           <a:p>
@@ -5224,7 +5224,7 @@
         </p:spPr>
         <p:txBody>
           <a:bodyPr wrap="square" lIns="0" tIns="0" rIns="0" bIns="0" rtlCol="0" anchor="t">
-            <a:spAutoFit/>
+            <a:noAutofit/>
           </a:bodyPr>
           <a:lstStyle/>
           <a:p>
@@ -5265,7 +5265,7 @@
         </p:spPr>
         <p:txBody>
           <a:bodyPr wrap="square" lIns="0" tIns="0" rIns="0" bIns="0" rtlCol="0" anchor="t">
-            <a:spAutoFit/>
+            <a:noAutofit/>
           </a:bodyPr>
           <a:lstStyle/>
           <a:p>
@@ -5306,7 +5306,7 @@
         </p:spPr>
         <p:txBody>
           <a:bodyPr wrap="square" lIns="0" tIns="0" rIns="0" bIns="0" rtlCol="0" anchor="t">
-            <a:spAutoFit/>
+            <a:noAutofit/>
           </a:bodyPr>
           <a:lstStyle/>
           <a:p>
@@ -5398,7 +5398,7 @@
         </p:spPr>
         <p:txBody>
           <a:bodyPr wrap="square" lIns="0" tIns="0" rIns="0" bIns="0" rtlCol="0" anchor="t">
-            <a:spAutoFit/>
+            <a:noAutofit/>
           </a:bodyPr>
           <a:lstStyle/>
           <a:p>
@@ -5439,7 +5439,7 @@
         </p:spPr>
         <p:txBody>
           <a:bodyPr wrap="square" lIns="0" tIns="0" rIns="0" bIns="0" rtlCol="0" anchor="t">
-            <a:spAutoFit/>
+            <a:noAutofit/>
           </a:bodyPr>
           <a:lstStyle/>
           <a:p>
@@ -5531,7 +5531,7 @@
         </p:spPr>
         <p:txBody>
           <a:bodyPr wrap="square" lIns="0" tIns="0" rIns="0" bIns="0" rtlCol="0" anchor="t">
-            <a:spAutoFit/>
+            <a:noAutofit/>
           </a:bodyPr>
           <a:lstStyle/>
           <a:p>
@@ -5572,7 +5572,7 @@
         </p:spPr>
         <p:txBody>
           <a:bodyPr wrap="square" lIns="0" tIns="0" rIns="0" bIns="0" rtlCol="0" anchor="t">
-            <a:spAutoFit/>
+            <a:noAutofit/>
           </a:bodyPr>
           <a:lstStyle/>
           <a:p>
@@ -5664,7 +5664,7 @@
         </p:spPr>
         <p:txBody>
           <a:bodyPr wrap="square" lIns="0" tIns="0" rIns="0" bIns="0" rtlCol="0" anchor="t">
-            <a:spAutoFit/>
+            <a:noAutofit/>
           </a:bodyPr>
           <a:lstStyle/>
           <a:p>
@@ -5705,7 +5705,7 @@
         </p:spPr>
         <p:txBody>
           <a:bodyPr wrap="square" lIns="0" tIns="0" rIns="0" bIns="0" rtlCol="0" anchor="t">
-            <a:spAutoFit/>
+            <a:noAutofit/>
           </a:bodyPr>
           <a:lstStyle/>
           <a:p>
@@ -5797,7 +5797,7 @@
         </p:spPr>
         <p:txBody>
           <a:bodyPr wrap="square" lIns="0" tIns="0" rIns="0" bIns="0" rtlCol="0" anchor="t">
-            <a:spAutoFit/>
+            <a:noAutofit/>
           </a:bodyPr>
           <a:lstStyle/>
           <a:p>
@@ -5838,7 +5838,7 @@
         </p:spPr>
         <p:txBody>
           <a:bodyPr wrap="square" lIns="0" tIns="0" rIns="0" bIns="0" rtlCol="0" anchor="t">
-            <a:spAutoFit/>
+            <a:noAutofit/>
           </a:bodyPr>
           <a:lstStyle/>
           <a:p>
@@ -5930,7 +5930,7 @@
         </p:spPr>
         <p:txBody>
           <a:bodyPr wrap="square" lIns="0" tIns="0" rIns="0" bIns="0" rtlCol="0" anchor="t">
-            <a:spAutoFit/>
+            <a:noAutofit/>
           </a:bodyPr>
           <a:lstStyle/>
           <a:p>
@@ -5971,7 +5971,7 @@
         </p:spPr>
         <p:txBody>
           <a:bodyPr wrap="square" lIns="0" tIns="0" rIns="0" bIns="0" rtlCol="0" anchor="t">
-            <a:spAutoFit/>
+            <a:noAutofit/>
           </a:bodyPr>
           <a:lstStyle/>
           <a:p>
@@ -6063,7 +6063,7 @@
         </p:spPr>
         <p:txBody>
           <a:bodyPr wrap="square" lIns="0" tIns="0" rIns="0" bIns="0" rtlCol="0" anchor="t">
-            <a:spAutoFit/>
+            <a:noAutofit/>
           </a:bodyPr>
           <a:lstStyle/>
           <a:p>
@@ -6104,7 +6104,7 @@
         </p:spPr>
         <p:txBody>
           <a:bodyPr wrap="square" lIns="0" tIns="0" rIns="0" bIns="0" rtlCol="0" anchor="t">
-            <a:spAutoFit/>
+            <a:noAutofit/>
           </a:bodyPr>
           <a:lstStyle/>
           <a:p>
@@ -6148,7 +6148,7 @@
         </p:spPr>
         <p:txBody>
           <a:bodyPr wrap="square" lIns="0" tIns="0" rIns="0" bIns="0" rtlCol="0" anchor="t">
-            <a:spAutoFit/>
+            <a:noAutofit/>
           </a:bodyPr>
           <a:lstStyle/>
           <a:p>
@@ -6420,7 +6420,7 @@
         </p:spPr>
         <p:txBody>
           <a:bodyPr wrap="square" lIns="0" tIns="0" rIns="0" bIns="0" rtlCol="0" anchor="t">
-            <a:spAutoFit/>
+            <a:noAutofit/>
           </a:bodyPr>
           <a:lstStyle/>
           <a:p>
@@ -6461,7 +6461,7 @@
         </p:spPr>
         <p:txBody>
           <a:bodyPr wrap="square" lIns="0" tIns="0" rIns="0" bIns="0" rtlCol="0" anchor="t">
-            <a:spAutoFit/>
+            <a:noAutofit/>
           </a:bodyPr>
           <a:lstStyle/>
           <a:p>
@@ -6502,7 +6502,7 @@
         </p:spPr>
         <p:txBody>
           <a:bodyPr wrap="square" lIns="0" tIns="0" rIns="0" bIns="0" rtlCol="0" anchor="t">
-            <a:spAutoFit/>
+            <a:noAutofit/>
           </a:bodyPr>
           <a:lstStyle/>
           <a:p>
@@ -6546,7 +6546,7 @@
         </p:spPr>
         <p:txBody>
           <a:bodyPr wrap="square" lIns="0" tIns="0" rIns="0" bIns="0" rtlCol="0" anchor="t">
-            <a:spAutoFit/>
+            <a:noAutofit/>
           </a:bodyPr>
           <a:lstStyle/>
           <a:p>
@@ -6597,7 +6597,7 @@
         </p:spPr>
         <p:txBody>
           <a:bodyPr wrap="square" lIns="104775" tIns="76200" rIns="104775" bIns="76200" rtlCol="0" anchor="t">
-            <a:spAutoFit/>
+            <a:noAutofit/>
           </a:bodyPr>
           <a:lstStyle/>
           <a:p>
@@ -6638,7 +6638,7 @@
         </p:spPr>
         <p:txBody>
           <a:bodyPr wrap="square" lIns="0" tIns="0" rIns="0" bIns="0" rtlCol="0" anchor="t">
-            <a:spAutoFit/>
+            <a:noAutofit/>
           </a:bodyPr>
           <a:lstStyle/>
           <a:p>
@@ -6686,7 +6686,7 @@
         </p:spPr>
         <p:txBody>
           <a:bodyPr wrap="square" lIns="104775" tIns="76200" rIns="104775" bIns="76200" rtlCol="0" anchor="t">
-            <a:spAutoFit/>
+            <a:noAutofit/>
           </a:bodyPr>
           <a:lstStyle/>
           <a:p>
@@ -6727,7 +6727,7 @@
         </p:spPr>
         <p:txBody>
           <a:bodyPr wrap="square" lIns="0" tIns="0" rIns="0" bIns="0" rtlCol="0" anchor="t">
-            <a:spAutoFit/>
+            <a:noAutofit/>
           </a:bodyPr>
           <a:lstStyle/>
           <a:p>
@@ -6775,7 +6775,7 @@
         </p:spPr>
         <p:txBody>
           <a:bodyPr wrap="square" lIns="104775" tIns="76200" rIns="104775" bIns="76200" rtlCol="0" anchor="t">
-            <a:spAutoFit/>
+            <a:noAutofit/>
           </a:bodyPr>
           <a:lstStyle/>
           <a:p>
@@ -6816,7 +6816,7 @@
         </p:spPr>
         <p:txBody>
           <a:bodyPr wrap="square" lIns="0" tIns="0" rIns="0" bIns="0" rtlCol="0" anchor="t">
-            <a:spAutoFit/>
+            <a:noAutofit/>
           </a:bodyPr>
           <a:lstStyle/>
           <a:p>
@@ -6864,7 +6864,7 @@
         </p:spPr>
         <p:txBody>
           <a:bodyPr wrap="square" lIns="104775" tIns="76200" rIns="104775" bIns="76200" rtlCol="0" anchor="t">
-            <a:spAutoFit/>
+            <a:noAutofit/>
           </a:bodyPr>
           <a:lstStyle/>
           <a:p>
@@ -6905,7 +6905,7 @@
         </p:spPr>
         <p:txBody>
           <a:bodyPr wrap="square" lIns="0" tIns="0" rIns="0" bIns="0" rtlCol="0" anchor="t">
-            <a:spAutoFit/>
+            <a:noAutofit/>
           </a:bodyPr>
           <a:lstStyle/>
           <a:p>
@@ -6953,7 +6953,7 @@
         </p:spPr>
         <p:txBody>
           <a:bodyPr wrap="square" lIns="104775" tIns="76200" rIns="104775" bIns="76200" rtlCol="0" anchor="t">
-            <a:spAutoFit/>
+            <a:noAutofit/>
           </a:bodyPr>
           <a:lstStyle/>
           <a:p>
@@ -6994,7 +6994,7 @@
         </p:spPr>
         <p:txBody>
           <a:bodyPr wrap="square" lIns="0" tIns="0" rIns="0" bIns="0" rtlCol="0" anchor="t">
-            <a:spAutoFit/>
+            <a:noAutofit/>
           </a:bodyPr>
           <a:lstStyle/>
           <a:p>
@@ -7035,7 +7035,7 @@
         </p:spPr>
         <p:txBody>
           <a:bodyPr wrap="square" lIns="0" tIns="0" rIns="0" bIns="0" rtlCol="0" anchor="t">
-            <a:spAutoFit/>
+            <a:noAutofit/>
           </a:bodyPr>
           <a:lstStyle/>
           <a:p>
@@ -7307,7 +7307,7 @@
         </p:spPr>
         <p:txBody>
           <a:bodyPr wrap="square" lIns="0" tIns="0" rIns="0" bIns="0" rtlCol="0" anchor="t">
-            <a:spAutoFit/>
+            <a:noAutofit/>
           </a:bodyPr>
           <a:lstStyle/>
           <a:p>
@@ -7348,7 +7348,7 @@
         </p:spPr>
         <p:txBody>
           <a:bodyPr wrap="square" lIns="0" tIns="0" rIns="0" bIns="0" rtlCol="0" anchor="t">
-            <a:spAutoFit/>
+            <a:noAutofit/>
           </a:bodyPr>
           <a:lstStyle/>
           <a:p>
@@ -7389,7 +7389,7 @@
         </p:spPr>
         <p:txBody>
           <a:bodyPr wrap="square" lIns="0" tIns="0" rIns="0" bIns="0" rtlCol="0" anchor="t">
-            <a:spAutoFit/>
+            <a:noAutofit/>
           </a:bodyPr>
           <a:lstStyle/>
           <a:p>
@@ -7481,7 +7481,7 @@
         </p:spPr>
         <p:txBody>
           <a:bodyPr wrap="square" lIns="0" tIns="0" rIns="0" bIns="0" rtlCol="0" anchor="t">
-            <a:spAutoFit/>
+            <a:noAutofit/>
           </a:bodyPr>
           <a:lstStyle/>
           <a:p>
@@ -7522,7 +7522,7 @@
         </p:spPr>
         <p:txBody>
           <a:bodyPr wrap="square" lIns="0" tIns="0" rIns="0" bIns="0" rtlCol="0" anchor="t">
-            <a:spAutoFit/>
+            <a:noAutofit/>
           </a:bodyPr>
           <a:lstStyle/>
           <a:p>
@@ -7614,7 +7614,7 @@
         </p:spPr>
         <p:txBody>
           <a:bodyPr wrap="square" lIns="0" tIns="0" rIns="0" bIns="0" rtlCol="0" anchor="t">
-            <a:spAutoFit/>
+            <a:noAutofit/>
           </a:bodyPr>
           <a:lstStyle/>
           <a:p>
@@ -7655,7 +7655,7 @@
         </p:spPr>
         <p:txBody>
           <a:bodyPr wrap="square" lIns="0" tIns="0" rIns="0" bIns="0" rtlCol="0" anchor="t">
-            <a:spAutoFit/>
+            <a:noAutofit/>
           </a:bodyPr>
           <a:lstStyle/>
           <a:p>
@@ -7747,7 +7747,7 @@
         </p:spPr>
         <p:txBody>
           <a:bodyPr wrap="square" lIns="0" tIns="0" rIns="0" bIns="0" rtlCol="0" anchor="t">
-            <a:spAutoFit/>
+            <a:noAutofit/>
           </a:bodyPr>
           <a:lstStyle/>
           <a:p>
@@ -7788,7 +7788,7 @@
         </p:spPr>
         <p:txBody>
           <a:bodyPr wrap="square" lIns="0" tIns="0" rIns="0" bIns="0" rtlCol="0" anchor="t">
-            <a:spAutoFit/>
+            <a:noAutofit/>
           </a:bodyPr>
           <a:lstStyle/>
           <a:p>
@@ -7880,7 +7880,7 @@
         </p:spPr>
         <p:txBody>
           <a:bodyPr wrap="square" lIns="0" tIns="0" rIns="0" bIns="0" rtlCol="0" anchor="t">
-            <a:spAutoFit/>
+            <a:noAutofit/>
           </a:bodyPr>
           <a:lstStyle/>
           <a:p>
@@ -7921,7 +7921,7 @@
         </p:spPr>
         <p:txBody>
           <a:bodyPr wrap="square" lIns="0" tIns="0" rIns="0" bIns="0" rtlCol="0" anchor="t">
-            <a:spAutoFit/>
+            <a:noAutofit/>
           </a:bodyPr>
           <a:lstStyle/>
           <a:p>
@@ -8013,7 +8013,7 @@
         </p:spPr>
         <p:txBody>
           <a:bodyPr wrap="square" lIns="0" tIns="0" rIns="0" bIns="0" rtlCol="0" anchor="t">
-            <a:spAutoFit/>
+            <a:noAutofit/>
           </a:bodyPr>
           <a:lstStyle/>
           <a:p>
@@ -8054,7 +8054,7 @@
         </p:spPr>
         <p:txBody>
           <a:bodyPr wrap="square" lIns="0" tIns="0" rIns="0" bIns="0" rtlCol="0" anchor="t">
-            <a:spAutoFit/>
+            <a:noAutofit/>
           </a:bodyPr>
           <a:lstStyle/>
           <a:p>
@@ -8098,7 +8098,7 @@
         </p:spPr>
         <p:txBody>
           <a:bodyPr wrap="square" lIns="0" tIns="0" rIns="0" bIns="0" rtlCol="0" anchor="t">
-            <a:spAutoFit/>
+            <a:noAutofit/>
           </a:bodyPr>
           <a:lstStyle/>
           <a:p>
@@ -8142,7 +8142,7 @@
         </p:spPr>
         <p:txBody>
           <a:bodyPr wrap="square" lIns="0" tIns="0" rIns="0" bIns="0" rtlCol="0" anchor="t">
-            <a:spAutoFit/>
+            <a:noAutofit/>
           </a:bodyPr>
           <a:lstStyle/>
           <a:p>
@@ -8414,7 +8414,7 @@
         </p:spPr>
         <p:txBody>
           <a:bodyPr wrap="square" lIns="0" tIns="0" rIns="0" bIns="0" rtlCol="0" anchor="t">
-            <a:spAutoFit/>
+            <a:noAutofit/>
           </a:bodyPr>
           <a:lstStyle/>
           <a:p>
@@ -8455,7 +8455,7 @@
         </p:spPr>
         <p:txBody>
           <a:bodyPr wrap="square" lIns="0" tIns="0" rIns="0" bIns="0" rtlCol="0" anchor="t">
-            <a:spAutoFit/>
+            <a:noAutofit/>
           </a:bodyPr>
           <a:lstStyle/>
           <a:p>
@@ -8496,7 +8496,7 @@
         </p:spPr>
         <p:txBody>
           <a:bodyPr wrap="square" lIns="0" tIns="0" rIns="0" bIns="0" rtlCol="0" anchor="t">
-            <a:spAutoFit/>
+            <a:noAutofit/>
           </a:bodyPr>
           <a:lstStyle/>
           <a:p>
@@ -8572,7 +8572,7 @@
         </p:spPr>
         <p:txBody>
           <a:bodyPr wrap="square" lIns="85725" tIns="104775" rIns="85725" bIns="104775" rtlCol="0" anchor="t">
-            <a:spAutoFit/>
+            <a:noAutofit/>
           </a:bodyPr>
           <a:lstStyle/>
           <a:p>
@@ -8645,7 +8645,7 @@
         </p:spPr>
         <p:txBody>
           <a:bodyPr wrap="square" lIns="85725" tIns="104775" rIns="85725" bIns="104775" rtlCol="0" anchor="t">
-            <a:spAutoFit/>
+            <a:noAutofit/>
           </a:bodyPr>
           <a:lstStyle/>
           <a:p>
@@ -8718,7 +8718,7 @@
         </p:spPr>
         <p:txBody>
           <a:bodyPr wrap="square" lIns="85725" tIns="104775" rIns="85725" bIns="104775" rtlCol="0" anchor="t">
-            <a:spAutoFit/>
+            <a:noAutofit/>
           </a:bodyPr>
           <a:lstStyle/>
           <a:p>
@@ -8791,7 +8791,7 @@
         </p:spPr>
         <p:txBody>
           <a:bodyPr wrap="square" lIns="85725" tIns="104775" rIns="85725" bIns="104775" rtlCol="0" anchor="t">
-            <a:spAutoFit/>
+            <a:noAutofit/>
           </a:bodyPr>
           <a:lstStyle/>
           <a:p>
@@ -8834,7 +8834,7 @@
         </p:spPr>
         <p:txBody>
           <a:bodyPr wrap="square" lIns="85725" tIns="104775" rIns="85725" bIns="104775" rtlCol="0" anchor="t">
-            <a:spAutoFit/>
+            <a:noAutofit/>
           </a:bodyPr>
           <a:lstStyle/>
           <a:p>
@@ -8925,7 +8925,7 @@
         </p:spPr>
         <p:txBody>
           <a:bodyPr wrap="square" lIns="95250" tIns="76200" rIns="95250" bIns="76200" rtlCol="0" anchor="t">
-            <a:spAutoFit/>
+            <a:noAutofit/>
           </a:bodyPr>
           <a:lstStyle/>
           <a:p>
@@ -8996,7 +8996,7 @@
         </p:spPr>
         <p:txBody>
           <a:bodyPr wrap="square" lIns="95250" tIns="76200" rIns="95250" bIns="76200" rtlCol="0" anchor="t">
-            <a:spAutoFit/>
+            <a:noAutofit/>
           </a:bodyPr>
           <a:lstStyle/>
           <a:p>
@@ -9067,7 +9067,7 @@
         </p:spPr>
         <p:txBody>
           <a:bodyPr wrap="square" lIns="95250" tIns="76200" rIns="95250" bIns="76200" rtlCol="0" anchor="t">
-            <a:spAutoFit/>
+            <a:noAutofit/>
           </a:bodyPr>
           <a:lstStyle/>
           <a:p>
@@ -9138,7 +9138,7 @@
         </p:spPr>
         <p:txBody>
           <a:bodyPr wrap="square" lIns="95250" tIns="76200" rIns="95250" bIns="76200" rtlCol="0" anchor="t">
-            <a:spAutoFit/>
+            <a:noAutofit/>
           </a:bodyPr>
           <a:lstStyle/>
           <a:p>
@@ -9209,7 +9209,7 @@
         </p:spPr>
         <p:txBody>
           <a:bodyPr wrap="square" lIns="95250" tIns="76200" rIns="95250" bIns="76200" rtlCol="0" anchor="t">
-            <a:spAutoFit/>
+            <a:noAutofit/>
           </a:bodyPr>
           <a:lstStyle/>
           <a:p>
@@ -9280,7 +9280,7 @@
         </p:spPr>
         <p:txBody>
           <a:bodyPr wrap="square" lIns="95250" tIns="76200" rIns="95250" bIns="76200" rtlCol="0" anchor="t">
-            <a:spAutoFit/>
+            <a:noAutofit/>
           </a:bodyPr>
           <a:lstStyle/>
           <a:p>
@@ -9321,7 +9321,7 @@
         </p:spPr>
         <p:txBody>
           <a:bodyPr wrap="square" lIns="0" tIns="0" rIns="0" bIns="0" rtlCol="0" anchor="t">
-            <a:spAutoFit/>
+            <a:noAutofit/>
           </a:bodyPr>
           <a:lstStyle/>
           <a:p>
@@ -9365,7 +9365,7 @@
         </p:spPr>
         <p:txBody>
           <a:bodyPr wrap="square" lIns="0" tIns="0" rIns="0" bIns="0" rtlCol="0" anchor="t">
-            <a:spAutoFit/>
+            <a:noAutofit/>
           </a:bodyPr>
           <a:lstStyle/>
           <a:p>
@@ -9637,7 +9637,7 @@
         </p:spPr>
         <p:txBody>
           <a:bodyPr wrap="square" lIns="0" tIns="0" rIns="0" bIns="0" rtlCol="0" anchor="t">
-            <a:spAutoFit/>
+            <a:noAutofit/>
           </a:bodyPr>
           <a:lstStyle/>
           <a:p>
@@ -9678,7 +9678,7 @@
         </p:spPr>
         <p:txBody>
           <a:bodyPr wrap="square" lIns="0" tIns="0" rIns="0" bIns="0" rtlCol="0" anchor="t">
-            <a:spAutoFit/>
+            <a:noAutofit/>
           </a:bodyPr>
           <a:lstStyle/>
           <a:p>
@@ -9719,7 +9719,7 @@
         </p:spPr>
         <p:txBody>
           <a:bodyPr wrap="square" lIns="0" tIns="0" rIns="0" bIns="0" rtlCol="0" anchor="t">
-            <a:spAutoFit/>
+            <a:noAutofit/>
           </a:bodyPr>
           <a:lstStyle/>
           <a:p>
@@ -9811,7 +9811,7 @@
         </p:spPr>
         <p:txBody>
           <a:bodyPr wrap="square" lIns="0" tIns="0" rIns="0" bIns="0" rtlCol="0" anchor="t">
-            <a:spAutoFit/>
+            <a:noAutofit/>
           </a:bodyPr>
           <a:lstStyle/>
           <a:p>
@@ -9852,7 +9852,7 @@
         </p:spPr>
         <p:txBody>
           <a:bodyPr wrap="square" lIns="0" tIns="0" rIns="0" bIns="0" rtlCol="0" anchor="t">
-            <a:spAutoFit/>
+            <a:noAutofit/>
           </a:bodyPr>
           <a:lstStyle/>
           <a:p>
@@ -9944,7 +9944,7 @@
         </p:spPr>
         <p:txBody>
           <a:bodyPr wrap="square" lIns="0" tIns="0" rIns="0" bIns="0" rtlCol="0" anchor="t">
-            <a:spAutoFit/>
+            <a:noAutofit/>
           </a:bodyPr>
           <a:lstStyle/>
           <a:p>
@@ -9985,7 +9985,7 @@
         </p:spPr>
         <p:txBody>
           <a:bodyPr wrap="square" lIns="0" tIns="0" rIns="0" bIns="0" rtlCol="0" anchor="t">
-            <a:spAutoFit/>
+            <a:noAutofit/>
           </a:bodyPr>
           <a:lstStyle/>
           <a:p>
@@ -10077,7 +10077,7 @@
         </p:spPr>
         <p:txBody>
           <a:bodyPr wrap="square" lIns="0" tIns="0" rIns="0" bIns="0" rtlCol="0" anchor="t">
-            <a:spAutoFit/>
+            <a:noAutofit/>
           </a:bodyPr>
           <a:lstStyle/>
           <a:p>
@@ -10118,7 +10118,7 @@
         </p:spPr>
         <p:txBody>
           <a:bodyPr wrap="square" lIns="0" tIns="0" rIns="0" bIns="0" rtlCol="0" anchor="t">
-            <a:spAutoFit/>
+            <a:noAutofit/>
           </a:bodyPr>
           <a:lstStyle/>
           <a:p>
@@ -10210,7 +10210,7 @@
         </p:spPr>
         <p:txBody>
           <a:bodyPr wrap="square" lIns="0" tIns="0" rIns="0" bIns="0" rtlCol="0" anchor="t">
-            <a:spAutoFit/>
+            <a:noAutofit/>
           </a:bodyPr>
           <a:lstStyle/>
           <a:p>
@@ -10251,7 +10251,7 @@
         </p:spPr>
         <p:txBody>
           <a:bodyPr wrap="square" lIns="0" tIns="0" rIns="0" bIns="0" rtlCol="0" anchor="t">
-            <a:spAutoFit/>
+            <a:noAutofit/>
           </a:bodyPr>
           <a:lstStyle/>
           <a:p>
@@ -10295,7 +10295,7 @@
         </p:spPr>
         <p:txBody>
           <a:bodyPr wrap="square" lIns="0" tIns="0" rIns="0" bIns="0" rtlCol="0" anchor="t">
-            <a:spAutoFit/>
+            <a:noAutofit/>
           </a:bodyPr>
           <a:lstStyle/>
           <a:p>
@@ -10339,7 +10339,7 @@
         </p:spPr>
         <p:txBody>
           <a:bodyPr wrap="square" lIns="0" tIns="0" rIns="0" bIns="0" rtlCol="0" anchor="t">
-            <a:spAutoFit/>
+            <a:noAutofit/>
           </a:bodyPr>
           <a:lstStyle/>
           <a:p>
@@ -10611,7 +10611,7 @@
         </p:spPr>
         <p:txBody>
           <a:bodyPr wrap="square" lIns="0" tIns="0" rIns="0" bIns="0" rtlCol="0" anchor="t">
-            <a:spAutoFit/>
+            <a:noAutofit/>
           </a:bodyPr>
           <a:lstStyle/>
           <a:p>
@@ -10652,7 +10652,7 @@
         </p:spPr>
         <p:txBody>
           <a:bodyPr wrap="square" lIns="0" tIns="0" rIns="0" bIns="0" rtlCol="0" anchor="t">
-            <a:spAutoFit/>
+            <a:noAutofit/>
           </a:bodyPr>
           <a:lstStyle/>
           <a:p>
@@ -10693,7 +10693,7 @@
         </p:spPr>
         <p:txBody>
           <a:bodyPr wrap="square" lIns="0" tIns="0" rIns="0" bIns="0" rtlCol="0" anchor="t">
-            <a:spAutoFit/>
+            <a:noAutofit/>
           </a:bodyPr>
           <a:lstStyle/>
           <a:p>
@@ -10737,7 +10737,7 @@
         </p:spPr>
         <p:txBody>
           <a:bodyPr wrap="square" lIns="0" tIns="0" rIns="0" bIns="0" rtlCol="0" anchor="t">
-            <a:spAutoFit/>
+            <a:noAutofit/>
           </a:bodyPr>
           <a:lstStyle/>
           <a:p>
@@ -10778,7 +10778,7 @@
         </p:spPr>
         <p:txBody>
           <a:bodyPr wrap="square" lIns="0" tIns="0" rIns="0" bIns="0" rtlCol="0" anchor="t">
-            <a:spAutoFit/>
+            <a:noAutofit/>
           </a:bodyPr>
           <a:lstStyle/>
           <a:p>
@@ -10822,7 +10822,7 @@
         </p:spPr>
         <p:txBody>
           <a:bodyPr wrap="square" lIns="0" tIns="0" rIns="0" bIns="0" rtlCol="0" anchor="t">
-            <a:spAutoFit/>
+            <a:noAutofit/>
           </a:bodyPr>
           <a:lstStyle/>
           <a:p>
@@ -10863,7 +10863,7 @@
         </p:spPr>
         <p:txBody>
           <a:bodyPr wrap="square" lIns="0" tIns="0" rIns="0" bIns="0" rtlCol="0" anchor="t">
-            <a:spAutoFit/>
+            <a:noAutofit/>
           </a:bodyPr>
           <a:lstStyle/>
           <a:p>
@@ -10907,7 +10907,7 @@
         </p:spPr>
         <p:txBody>
           <a:bodyPr wrap="square" lIns="0" tIns="0" rIns="0" bIns="0" rtlCol="0" anchor="t">
-            <a:spAutoFit/>
+            <a:noAutofit/>
           </a:bodyPr>
           <a:lstStyle/>
           <a:p>
@@ -11179,7 +11179,7 @@
         </p:spPr>
         <p:txBody>
           <a:bodyPr wrap="square" lIns="0" tIns="0" rIns="0" bIns="0" rtlCol="0" anchor="t">
-            <a:spAutoFit/>
+            <a:noAutofit/>
           </a:bodyPr>
           <a:lstStyle/>
           <a:p>
@@ -11220,7 +11220,7 @@
         </p:spPr>
         <p:txBody>
           <a:bodyPr wrap="square" lIns="0" tIns="0" rIns="0" bIns="0" rtlCol="0" anchor="t">
-            <a:spAutoFit/>
+            <a:noAutofit/>
           </a:bodyPr>
           <a:lstStyle/>
           <a:p>
@@ -11261,7 +11261,7 @@
         </p:spPr>
         <p:txBody>
           <a:bodyPr wrap="square" lIns="0" tIns="0" rIns="0" bIns="0" rtlCol="0" anchor="t">
-            <a:spAutoFit/>
+            <a:noAutofit/>
           </a:bodyPr>
           <a:lstStyle/>
           <a:p>
@@ -11327,7 +11327,7 @@
         </p:spPr>
         <p:txBody>
           <a:bodyPr wrap="square" lIns="0" tIns="0" rIns="0" bIns="0" rtlCol="0" anchor="t">
-            <a:spAutoFit/>
+            <a:noAutofit/>
           </a:bodyPr>
           <a:lstStyle/>
           <a:p>
@@ -11371,7 +11371,7 @@
         </p:spPr>
         <p:txBody>
           <a:bodyPr wrap="square" lIns="0" tIns="0" rIns="0" bIns="0" rtlCol="0" anchor="t">
-            <a:spAutoFit/>
+            <a:noAutofit/>
           </a:bodyPr>
           <a:lstStyle/>
           <a:p>
@@ -11412,7 +11412,7 @@
         </p:spPr>
         <p:txBody>
           <a:bodyPr wrap="square" lIns="0" tIns="0" rIns="0" bIns="0" rtlCol="0" anchor="t">
-            <a:spAutoFit/>
+            <a:noAutofit/>
           </a:bodyPr>
           <a:lstStyle/>
           <a:p>
@@ -11463,7 +11463,7 @@
         </p:spPr>
         <p:txBody>
           <a:bodyPr wrap="square" lIns="104775" tIns="76200" rIns="104775" bIns="76200" rtlCol="0" anchor="t">
-            <a:spAutoFit/>
+            <a:noAutofit/>
           </a:bodyPr>
           <a:lstStyle/>
           <a:p>
@@ -11514,7 +11514,7 @@
         </p:spPr>
         <p:txBody>
           <a:bodyPr wrap="square" lIns="104775" tIns="76200" rIns="104775" bIns="76200" rtlCol="0" anchor="t">
-            <a:spAutoFit/>
+            <a:noAutofit/>
           </a:bodyPr>
           <a:lstStyle/>
           <a:p>
@@ -11565,7 +11565,7 @@
         </p:spPr>
         <p:txBody>
           <a:bodyPr wrap="square" lIns="104775" tIns="76200" rIns="104775" bIns="76200" rtlCol="0" anchor="t">
-            <a:spAutoFit/>
+            <a:noAutofit/>
           </a:bodyPr>
           <a:lstStyle/>
           <a:p>
@@ -11609,7 +11609,7 @@
         </p:spPr>
         <p:txBody>
           <a:bodyPr wrap="square" lIns="0" tIns="0" rIns="0" bIns="0" rtlCol="0" anchor="t">
-            <a:spAutoFit/>
+            <a:noAutofit/>
           </a:bodyPr>
           <a:lstStyle/>
           <a:p>
@@ -11653,7 +11653,7 @@
         </p:spPr>
         <p:txBody>
           <a:bodyPr wrap="square" lIns="0" tIns="0" rIns="0" bIns="0" rtlCol="0" anchor="t">
-            <a:spAutoFit/>
+            <a:noAutofit/>
           </a:bodyPr>
           <a:lstStyle/>
           <a:p>
@@ -11925,7 +11925,7 @@
         </p:spPr>
         <p:txBody>
           <a:bodyPr wrap="square" lIns="0" tIns="0" rIns="0" bIns="0" rtlCol="0" anchor="t">
-            <a:spAutoFit/>
+            <a:noAutofit/>
           </a:bodyPr>
           <a:lstStyle/>
           <a:p>
@@ -11966,7 +11966,7 @@
         </p:spPr>
         <p:txBody>
           <a:bodyPr wrap="square" lIns="0" tIns="0" rIns="0" bIns="0" rtlCol="0" anchor="t">
-            <a:spAutoFit/>
+            <a:noAutofit/>
           </a:bodyPr>
           <a:lstStyle/>
           <a:p>
@@ -12007,7 +12007,7 @@
         </p:spPr>
         <p:txBody>
           <a:bodyPr wrap="square" lIns="0" tIns="0" rIns="0" bIns="0" rtlCol="0" anchor="t">
-            <a:spAutoFit/>
+            <a:noAutofit/>
           </a:bodyPr>
           <a:lstStyle/>
           <a:p>
@@ -12051,7 +12051,7 @@
         </p:spPr>
         <p:txBody>
           <a:bodyPr wrap="square" lIns="0" tIns="0" rIns="0" bIns="0" rtlCol="0" anchor="t">
-            <a:spAutoFit/>
+            <a:noAutofit/>
           </a:bodyPr>
           <a:lstStyle/>
           <a:p>
@@ -12128,7 +12128,7 @@
         </p:spPr>
         <p:txBody>
           <a:bodyPr wrap="square" lIns="76200" tIns="57150" rIns="76200" bIns="57150" rtlCol="0" anchor="t">
-            <a:spAutoFit/>
+            <a:noAutofit/>
           </a:bodyPr>
           <a:lstStyle/>
           <a:p>
@@ -12173,7 +12173,7 @@
         </p:spPr>
         <p:txBody>
           <a:bodyPr wrap="square" lIns="76200" tIns="57150" rIns="76200" bIns="57150" rtlCol="0" anchor="t">
-            <a:spAutoFit/>
+            <a:noAutofit/>
           </a:bodyPr>
           <a:lstStyle/>
           <a:p>
@@ -12218,7 +12218,7 @@
         </p:spPr>
         <p:txBody>
           <a:bodyPr wrap="square" lIns="76200" tIns="57150" rIns="76200" bIns="57150" rtlCol="0" anchor="t">
-            <a:spAutoFit/>
+            <a:noAutofit/>
           </a:bodyPr>
           <a:lstStyle/>
           <a:p>
@@ -12263,7 +12263,7 @@
         </p:spPr>
         <p:txBody>
           <a:bodyPr wrap="square" lIns="76200" tIns="57150" rIns="76200" bIns="57150" rtlCol="0" anchor="t">
-            <a:spAutoFit/>
+            <a:noAutofit/>
           </a:bodyPr>
           <a:lstStyle/>
           <a:p>
@@ -12308,7 +12308,7 @@
         </p:spPr>
         <p:txBody>
           <a:bodyPr wrap="square" lIns="76200" tIns="57150" rIns="76200" bIns="57150" rtlCol="0" anchor="t">
-            <a:spAutoFit/>
+            <a:noAutofit/>
           </a:bodyPr>
           <a:lstStyle/>
           <a:p>
@@ -12349,7 +12349,7 @@
         </p:spPr>
         <p:txBody>
           <a:bodyPr wrap="square" lIns="0" tIns="0" rIns="0" bIns="0" rtlCol="0" anchor="t">
-            <a:spAutoFit/>
+            <a:noAutofit/>
           </a:bodyPr>
           <a:lstStyle/>
           <a:p>
@@ -12393,7 +12393,7 @@
         </p:spPr>
         <p:txBody>
           <a:bodyPr wrap="square" lIns="0" tIns="0" rIns="0" bIns="0" rtlCol="0" anchor="t">
-            <a:spAutoFit/>
+            <a:noAutofit/>
           </a:bodyPr>
           <a:lstStyle/>
           <a:p>
@@ -12465,7 +12465,7 @@
         </p:spPr>
         <p:txBody>
           <a:bodyPr wrap="square" lIns="76200" tIns="57150" rIns="76200" bIns="57150" rtlCol="0" anchor="t">
-            <a:spAutoFit/>
+            <a:noAutofit/>
           </a:bodyPr>
           <a:lstStyle/>
           <a:p>
@@ -12510,7 +12510,7 @@
         </p:spPr>
         <p:txBody>
           <a:bodyPr wrap="square" lIns="76200" tIns="57150" rIns="76200" bIns="57150" rtlCol="0" anchor="t">
-            <a:spAutoFit/>
+            <a:noAutofit/>
           </a:bodyPr>
           <a:lstStyle/>
           <a:p>
@@ -12555,7 +12555,7 @@
         </p:spPr>
         <p:txBody>
           <a:bodyPr wrap="square" lIns="76200" tIns="57150" rIns="76200" bIns="57150" rtlCol="0" anchor="t">
-            <a:spAutoFit/>
+            <a:noAutofit/>
           </a:bodyPr>
           <a:lstStyle/>
           <a:p>
@@ -12600,7 +12600,7 @@
         </p:spPr>
         <p:txBody>
           <a:bodyPr wrap="square" lIns="76200" tIns="57150" rIns="76200" bIns="57150" rtlCol="0" anchor="t">
-            <a:spAutoFit/>
+            <a:noAutofit/>
           </a:bodyPr>
           <a:lstStyle/>
           <a:p>
@@ -12641,7 +12641,7 @@
         </p:spPr>
         <p:txBody>
           <a:bodyPr wrap="square" lIns="0" tIns="0" rIns="0" bIns="0" rtlCol="0" anchor="t">
-            <a:spAutoFit/>
+            <a:noAutofit/>
           </a:bodyPr>
           <a:lstStyle/>
           <a:p>
@@ -12685,7 +12685,7 @@
         </p:spPr>
         <p:txBody>
           <a:bodyPr wrap="square" lIns="0" tIns="0" rIns="0" bIns="0" rtlCol="0" anchor="t">
-            <a:spAutoFit/>
+            <a:noAutofit/>
           </a:bodyPr>
           <a:lstStyle/>
           <a:p>
@@ -12726,7 +12726,7 @@
         </p:spPr>
         <p:txBody>
           <a:bodyPr wrap="square" lIns="0" tIns="0" rIns="0" bIns="0" rtlCol="0" anchor="t">
-            <a:spAutoFit/>
+            <a:noAutofit/>
           </a:bodyPr>
           <a:lstStyle/>
           <a:p>
@@ -12998,7 +12998,7 @@
         </p:spPr>
         <p:txBody>
           <a:bodyPr wrap="square" lIns="0" tIns="0" rIns="0" bIns="0" rtlCol="0" anchor="t">
-            <a:spAutoFit/>
+            <a:noAutofit/>
           </a:bodyPr>
           <a:lstStyle/>
           <a:p>
@@ -13039,7 +13039,7 @@
         </p:spPr>
         <p:txBody>
           <a:bodyPr wrap="square" lIns="0" tIns="0" rIns="0" bIns="0" rtlCol="0" anchor="t">
-            <a:spAutoFit/>
+            <a:noAutofit/>
           </a:bodyPr>
           <a:lstStyle/>
           <a:p>
@@ -13080,7 +13080,7 @@
         </p:spPr>
         <p:txBody>
           <a:bodyPr wrap="square" lIns="0" tIns="0" rIns="0" bIns="0" rtlCol="0" anchor="t">
-            <a:spAutoFit/>
+            <a:noAutofit/>
           </a:bodyPr>
           <a:lstStyle/>
           <a:p>
@@ -13124,7 +13124,7 @@
         </p:spPr>
         <p:txBody>
           <a:bodyPr wrap="square" lIns="0" tIns="0" rIns="0" bIns="0" rtlCol="0" anchor="t">
-            <a:spAutoFit/>
+            <a:noAutofit/>
           </a:bodyPr>
           <a:lstStyle/>
           <a:p>
@@ -13175,7 +13175,7 @@
         </p:spPr>
         <p:txBody>
           <a:bodyPr wrap="square" lIns="104775" tIns="76200" rIns="104775" bIns="76200" rtlCol="0" anchor="t">
-            <a:spAutoFit/>
+            <a:noAutofit/>
           </a:bodyPr>
           <a:lstStyle/>
           <a:p>
@@ -13226,7 +13226,7 @@
         </p:spPr>
         <p:txBody>
           <a:bodyPr wrap="square" lIns="104775" tIns="76200" rIns="104775" bIns="76200" rtlCol="0" anchor="t">
-            <a:spAutoFit/>
+            <a:noAutofit/>
           </a:bodyPr>
           <a:lstStyle/>
           <a:p>
@@ -13277,7 +13277,7 @@
         </p:spPr>
         <p:txBody>
           <a:bodyPr wrap="square" lIns="104775" tIns="76200" rIns="104775" bIns="76200" rtlCol="0" anchor="t">
-            <a:spAutoFit/>
+            <a:noAutofit/>
           </a:bodyPr>
           <a:lstStyle/>
           <a:p>
@@ -13328,7 +13328,7 @@
         </p:spPr>
         <p:txBody>
           <a:bodyPr wrap="square" lIns="104775" tIns="76200" rIns="104775" bIns="76200" rtlCol="0" anchor="t">
-            <a:spAutoFit/>
+            <a:noAutofit/>
           </a:bodyPr>
           <a:lstStyle/>
           <a:p>
@@ -13379,7 +13379,7 @@
         </p:spPr>
         <p:txBody>
           <a:bodyPr wrap="square" lIns="104775" tIns="76200" rIns="104775" bIns="76200" rtlCol="0" anchor="t">
-            <a:spAutoFit/>
+            <a:noAutofit/>
           </a:bodyPr>
           <a:lstStyle/>
           <a:p>
@@ -13428,7 +13428,7 @@
         </p:spPr>
         <p:txBody>
           <a:bodyPr wrap="square" lIns="104775" tIns="76200" rIns="104775" bIns="76200" rtlCol="0" anchor="t">
-            <a:spAutoFit/>
+            <a:noAutofit/>
           </a:bodyPr>
           <a:lstStyle/>
           <a:p>
@@ -13474,7 +13474,7 @@
         </p:spPr>
         <p:txBody>
           <a:bodyPr wrap="square" lIns="104775" tIns="76200" rIns="104775" bIns="76200" rtlCol="0" anchor="t">
-            <a:spAutoFit/>
+            <a:noAutofit/>
           </a:bodyPr>
           <a:lstStyle/>
           <a:p>
@@ -13515,7 +13515,7 @@
         </p:spPr>
         <p:txBody>
           <a:bodyPr wrap="square" lIns="0" tIns="0" rIns="0" bIns="0" rtlCol="0" anchor="ctr">
-            <a:spAutoFit/>
+            <a:noAutofit/>
           </a:bodyPr>
           <a:lstStyle/>
           <a:p>
@@ -13576,7 +13576,7 @@
         </p:spPr>
         <p:txBody>
           <a:bodyPr wrap="square" lIns="0" tIns="0" rIns="0" bIns="0" rtlCol="0" anchor="t">
-            <a:spAutoFit/>
+            <a:noAutofit/>
           </a:bodyPr>
           <a:lstStyle/>
           <a:p>
@@ -13848,7 +13848,7 @@
         </p:spPr>
         <p:txBody>
           <a:bodyPr wrap="square" lIns="0" tIns="0" rIns="0" bIns="0" rtlCol="0" anchor="t">
-            <a:spAutoFit/>
+            <a:noAutofit/>
           </a:bodyPr>
           <a:lstStyle/>
           <a:p>
@@ -13889,7 +13889,7 @@
         </p:spPr>
         <p:txBody>
           <a:bodyPr wrap="square" lIns="0" tIns="0" rIns="0" bIns="0" rtlCol="0" anchor="t">
-            <a:spAutoFit/>
+            <a:noAutofit/>
           </a:bodyPr>
           <a:lstStyle/>
           <a:p>
@@ -13930,7 +13930,7 @@
         </p:spPr>
         <p:txBody>
           <a:bodyPr wrap="square" lIns="0" tIns="0" rIns="0" bIns="0" rtlCol="0" anchor="t">
-            <a:spAutoFit/>
+            <a:noAutofit/>
           </a:bodyPr>
           <a:lstStyle/>
           <a:p>
@@ -13974,7 +13974,7 @@
         </p:spPr>
         <p:txBody>
           <a:bodyPr wrap="square" lIns="0" tIns="0" rIns="0" bIns="0" rtlCol="0" anchor="t">
-            <a:spAutoFit/>
+            <a:noAutofit/>
           </a:bodyPr>
           <a:lstStyle/>
           <a:p>
@@ -14046,7 +14046,7 @@
         </p:spPr>
         <p:txBody>
           <a:bodyPr wrap="square" lIns="76200" tIns="57150" rIns="76200" bIns="57150" rtlCol="0" anchor="t">
-            <a:spAutoFit/>
+            <a:noAutofit/>
           </a:bodyPr>
           <a:lstStyle/>
           <a:p>
@@ -14091,7 +14091,7 @@
         </p:spPr>
         <p:txBody>
           <a:bodyPr wrap="square" lIns="76200" tIns="57150" rIns="76200" bIns="57150" rtlCol="0" anchor="t">
-            <a:spAutoFit/>
+            <a:noAutofit/>
           </a:bodyPr>
           <a:lstStyle/>
           <a:p>
@@ -14132,7 +14132,7 @@
         </p:spPr>
         <p:txBody>
           <a:bodyPr wrap="square" lIns="0" tIns="0" rIns="0" bIns="0" rtlCol="0" anchor="t">
-            <a:spAutoFit/>
+            <a:noAutofit/>
           </a:bodyPr>
           <a:lstStyle/>
           <a:p>
@@ -14204,7 +14204,7 @@
         </p:spPr>
         <p:txBody>
           <a:bodyPr wrap="square" lIns="76200" tIns="57150" rIns="76200" bIns="57150" rtlCol="0" anchor="t">
-            <a:spAutoFit/>
+            <a:noAutofit/>
           </a:bodyPr>
           <a:lstStyle/>
           <a:p>
@@ -14249,7 +14249,7 @@
         </p:spPr>
         <p:txBody>
           <a:bodyPr wrap="square" lIns="76200" tIns="57150" rIns="76200" bIns="57150" rtlCol="0" anchor="t">
-            <a:spAutoFit/>
+            <a:noAutofit/>
           </a:bodyPr>
           <a:lstStyle/>
           <a:p>
@@ -14290,7 +14290,7 @@
         </p:spPr>
         <p:txBody>
           <a:bodyPr wrap="square" lIns="0" tIns="0" rIns="0" bIns="0" rtlCol="0" anchor="t">
-            <a:spAutoFit/>
+            <a:noAutofit/>
           </a:bodyPr>
           <a:lstStyle/>
           <a:p>
@@ -14334,7 +14334,7 @@
         </p:spPr>
         <p:txBody>
           <a:bodyPr wrap="square" lIns="0" tIns="0" rIns="0" bIns="0" rtlCol="0" anchor="t">
-            <a:spAutoFit/>
+            <a:noAutofit/>
           </a:bodyPr>
           <a:lstStyle/>
           <a:p>
